--- a/tests/golden/visual/composition/v7_hybrid_canvas/deck.pptx
+++ b/tests/golden/visual/composition/v7_hybrid_canvas/deck.pptx
@@ -957,11 +957,11 @@
           <a:solidFill>
             <a:srgbClr val="FFFFFF"/>
           </a:solidFill>
-          <a:ln w="12700">
+          <a:ln w="19050">
             <a:solidFill>
-              <a:srgbClr val="8B4513"/>
+              <a:srgbClr val="C47B2B"/>
             </a:solidFill>
-            <a:prstDash val="solid"/>
+            <a:prstDash val="dash"/>
           </a:ln>
         </p:spPr>
       </p:sp>
@@ -998,7 +998,7 @@
                 <a:ea typeface="Microsoft YaHei" pitchFamily="34" charset="-122"/>
                 <a:cs typeface="Microsoft YaHei" pitchFamily="34" charset="-120"/>
               </a:rPr>
-              <a:t>图纸占位</a:t>
+              <a:t>技术图纸缺失</a:t>
             </a:r>
             <a:endParaRPr lang="en-US" sz="1200" dirty="0"/>
           </a:p>
@@ -1060,11 +1060,11 @@
           <a:solidFill>
             <a:srgbClr val="FFFFFF"/>
           </a:solidFill>
-          <a:ln w="12700">
+          <a:ln w="19050">
             <a:solidFill>
-              <a:srgbClr val="8B4513"/>
+              <a:srgbClr val="C47B2B"/>
             </a:solidFill>
-            <a:prstDash val="solid"/>
+            <a:prstDash val="dash"/>
           </a:ln>
         </p:spPr>
       </p:sp>
@@ -1101,7 +1101,7 @@
                 <a:ea typeface="Microsoft YaHei" pitchFamily="34" charset="-122"/>
                 <a:cs typeface="Microsoft YaHei" pitchFamily="34" charset="-120"/>
               </a:rPr>
-              <a:t>图片占位</a:t>
+              <a:t>素材缺失/路径未解析</a:t>
             </a:r>
             <a:endParaRPr lang="en-US" sz="1200" dirty="0"/>
           </a:p>
@@ -1124,11 +1124,11 @@
           <a:solidFill>
             <a:srgbClr val="FFFFFF"/>
           </a:solidFill>
-          <a:ln w="12700">
+          <a:ln w="19050">
             <a:solidFill>
-              <a:srgbClr val="8B4513"/>
+              <a:srgbClr val="C47B2B"/>
             </a:solidFill>
-            <a:prstDash val="solid"/>
+            <a:prstDash val="dash"/>
           </a:ln>
         </p:spPr>
       </p:sp>
@@ -1165,7 +1165,7 @@
                 <a:ea typeface="Microsoft YaHei" pitchFamily="34" charset="-122"/>
                 <a:cs typeface="Microsoft YaHei" pitchFamily="34" charset="-120"/>
               </a:rPr>
-              <a:t>图片占位</a:t>
+              <a:t>素材缺失/路径未解析</a:t>
             </a:r>
             <a:endParaRPr lang="en-US" sz="1200" dirty="0"/>
           </a:p>

--- a/tests/golden/visual/composition/v7_hybrid_canvas/deck.pptx
+++ b/tests/golden/visual/composition/v7_hybrid_canvas/deck.pptx
@@ -910,7 +910,7 @@
         <p:spPr>
           <a:xfrm>
             <a:off x="640080" y="411480"/>
-            <a:ext cx="7863840" cy="411480"/>
+            <a:ext cx="7863840" cy="601218"/>
           </a:xfrm>
           <a:prstGeom prst="rect">
             <a:avLst/>
@@ -948,8 +948,8 @@
         </p:nvSpPr>
         <p:spPr>
           <a:xfrm>
-            <a:off x="640080" y="899160"/>
-            <a:ext cx="4009949" cy="2865973"/>
+            <a:off x="640080" y="1088898"/>
+            <a:ext cx="4009949" cy="2699004"/>
           </a:xfrm>
           <a:prstGeom prst="rect">
             <a:avLst/>
@@ -973,7 +973,7 @@
         </p:nvSpPr>
         <p:spPr>
           <a:xfrm>
-            <a:off x="777240" y="2149267"/>
+            <a:off x="777240" y="2255520"/>
             <a:ext cx="3735629" cy="365760"/>
           </a:xfrm>
           <a:prstGeom prst="rect">
@@ -1012,8 +1012,8 @@
         </p:nvSpPr>
         <p:spPr>
           <a:xfrm>
-            <a:off x="640080" y="3803233"/>
-            <a:ext cx="4009949" cy="352715"/>
+            <a:off x="640080" y="3826002"/>
+            <a:ext cx="4009949" cy="329946"/>
           </a:xfrm>
           <a:prstGeom prst="rect">
             <a:avLst/>
@@ -1051,8 +1051,8 @@
         </p:nvSpPr>
         <p:spPr>
           <a:xfrm>
-            <a:off x="4802429" y="899160"/>
-            <a:ext cx="1812646" cy="1234440"/>
+            <a:off x="4802429" y="1088898"/>
+            <a:ext cx="1812646" cy="1165479"/>
           </a:xfrm>
           <a:prstGeom prst="rect">
             <a:avLst/>
@@ -1076,7 +1076,7 @@
         </p:nvSpPr>
         <p:spPr>
           <a:xfrm>
-            <a:off x="4939589" y="1333500"/>
+            <a:off x="4939589" y="1488758"/>
             <a:ext cx="1538326" cy="365760"/>
           </a:xfrm>
           <a:prstGeom prst="rect">
@@ -1115,8 +1115,8 @@
         </p:nvSpPr>
         <p:spPr>
           <a:xfrm>
-            <a:off x="6691274" y="899160"/>
-            <a:ext cx="1812646" cy="1234440"/>
+            <a:off x="6691274" y="1088898"/>
+            <a:ext cx="1812646" cy="1165479"/>
           </a:xfrm>
           <a:prstGeom prst="rect">
             <a:avLst/>
@@ -1140,7 +1140,7 @@
         </p:nvSpPr>
         <p:spPr>
           <a:xfrm>
-            <a:off x="6828434" y="1333500"/>
+            <a:off x="6828434" y="1488758"/>
             <a:ext cx="1538326" cy="365760"/>
           </a:xfrm>
           <a:prstGeom prst="rect">
@@ -1179,8 +1179,8 @@
         </p:nvSpPr>
         <p:spPr>
           <a:xfrm>
-            <a:off x="4802429" y="2209800"/>
-            <a:ext cx="1831696" cy="640080"/>
+            <a:off x="4802429" y="2330577"/>
+            <a:ext cx="1831696" cy="395478"/>
           </a:xfrm>
           <a:prstGeom prst="rect">
             <a:avLst/>
@@ -1218,8 +1218,8 @@
         </p:nvSpPr>
         <p:spPr>
           <a:xfrm>
-            <a:off x="6672224" y="2209800"/>
-            <a:ext cx="1831696" cy="640080"/>
+            <a:off x="6672224" y="2330577"/>
+            <a:ext cx="1831696" cy="395478"/>
           </a:xfrm>
           <a:prstGeom prst="rect">
             <a:avLst/>
@@ -1257,8 +1257,8 @@
         </p:nvSpPr>
         <p:spPr>
           <a:xfrm>
-            <a:off x="4802429" y="2926080"/>
-            <a:ext cx="3701491" cy="430454"/>
+            <a:off x="4802429" y="2802255"/>
+            <a:ext cx="3701491" cy="635508"/>
           </a:xfrm>
           <a:prstGeom prst="rect">
             <a:avLst/>
@@ -1296,8 +1296,8 @@
         </p:nvSpPr>
         <p:spPr>
           <a:xfrm>
-            <a:off x="4802429" y="3394634"/>
-            <a:ext cx="3701491" cy="541858"/>
+            <a:off x="4802429" y="3475863"/>
+            <a:ext cx="3701491" cy="320040"/>
           </a:xfrm>
           <a:prstGeom prst="rect">
             <a:avLst/>
@@ -1322,23 +1322,6 @@
                 <a:cs typeface="Microsoft YaHei" pitchFamily="34" charset="-120"/>
               </a:rPr>
               <a:t>· 优先打通北侧急救轴</a:t>
-            </a:r>
-            <a:endParaRPr lang="en-US" sz="1600" dirty="0"/>
-          </a:p>
-          <a:p>
-            <a:pPr algn="l" indent="0" marL="0">
-              <a:buNone/>
-            </a:pPr>
-            <a:r>
-              <a:rPr lang="en-US" sz="1600" dirty="0">
-                <a:solidFill>
-                  <a:srgbClr val="1A1A1A"/>
-                </a:solidFill>
-                <a:latin typeface="Microsoft YaHei" pitchFamily="34" charset="0"/>
-                <a:ea typeface="Microsoft YaHei" pitchFamily="34" charset="-122"/>
-                <a:cs typeface="Microsoft YaHei" pitchFamily="34" charset="-120"/>
-              </a:rPr>
-              <a:t>· 保留南侧景观缓冲</a:t>
             </a:r>
             <a:endParaRPr lang="en-US" sz="1600" dirty="0"/>
           </a:p>

--- a/tests/golden/visual/composition/v7_hybrid_canvas/deck.pptx
+++ b/tests/golden/visual/composition/v7_hybrid_canvas/deck.pptx
@@ -910,7 +910,7 @@
         <p:spPr>
           <a:xfrm>
             <a:off x="640080" y="411480"/>
-            <a:ext cx="7863840" cy="601218"/>
+            <a:ext cx="7863840" cy="621792"/>
           </a:xfrm>
           <a:prstGeom prst="rect">
             <a:avLst/>
@@ -948,8 +948,33 @@
         </p:nvSpPr>
         <p:spPr>
           <a:xfrm>
-            <a:off x="640080" y="1088898"/>
-            <a:ext cx="4009949" cy="2699004"/>
+            <a:off x="5110886" y="1109472"/>
+            <a:ext cx="3393034" cy="3046476"/>
+          </a:xfrm>
+          <a:prstGeom prst="rect">
+            <a:avLst/>
+          </a:prstGeom>
+          <a:solidFill>
+            <a:srgbClr val="F2F3F1"/>
+          </a:solidFill>
+          <a:ln w="12700">
+            <a:solidFill>
+              <a:srgbClr val="D9D5CF"/>
+            </a:solidFill>
+            <a:prstDash val="solid"/>
+          </a:ln>
+        </p:spPr>
+      </p:sp>
+      <p:sp>
+        <p:nvSpPr>
+          <p:cNvPr id="4" name="Shape 2"/>
+          <p:cNvSpPr/>
+          <p:nvPr/>
+        </p:nvSpPr>
+        <p:spPr>
+          <a:xfrm>
+            <a:off x="640080" y="1109472"/>
+            <a:ext cx="4318406" cy="2680899"/>
           </a:xfrm>
           <a:prstGeom prst="rect">
             <a:avLst/>
@@ -967,14 +992,14 @@
       </p:sp>
       <p:sp>
         <p:nvSpPr>
-          <p:cNvPr id="4" name="Text 2"/>
+          <p:cNvPr id="5" name="Text 3"/>
           <p:cNvSpPr/>
           <p:nvPr/>
         </p:nvSpPr>
         <p:spPr>
           <a:xfrm>
-            <a:off x="777240" y="2255520"/>
-            <a:ext cx="3735629" cy="365760"/>
+            <a:off x="777240" y="2267041"/>
+            <a:ext cx="4044086" cy="365760"/>
           </a:xfrm>
           <a:prstGeom prst="rect">
             <a:avLst/>
@@ -998,7 +1023,7 @@
                 <a:ea typeface="Microsoft YaHei" pitchFamily="34" charset="-122"/>
                 <a:cs typeface="Microsoft YaHei" pitchFamily="34" charset="-120"/>
               </a:rPr>
-              <a:t>技术图纸缺失</a:t>
+              <a:t>素材缺失/路径未解析</a:t>
             </a:r>
             <a:endParaRPr lang="en-US" sz="1200" dirty="0"/>
           </a:p>
@@ -1006,14 +1031,14 @@
       </p:sp>
       <p:sp>
         <p:nvSpPr>
-          <p:cNvPr id="5" name="Text 3"/>
+          <p:cNvPr id="6" name="Text 4"/>
           <p:cNvSpPr/>
           <p:nvPr/>
         </p:nvSpPr>
         <p:spPr>
           <a:xfrm>
-            <a:off x="640080" y="3826002"/>
-            <a:ext cx="4009949" cy="329946"/>
+            <a:off x="640080" y="3828471"/>
+            <a:ext cx="4318406" cy="327477"/>
           </a:xfrm>
           <a:prstGeom prst="rect">
             <a:avLst/>
@@ -1045,14 +1070,14 @@
       </p:sp>
       <p:sp>
         <p:nvSpPr>
-          <p:cNvPr id="6" name="Shape 4"/>
+          <p:cNvPr id="7" name="Shape 5"/>
           <p:cNvSpPr/>
           <p:nvPr/>
         </p:nvSpPr>
         <p:spPr>
           <a:xfrm>
-            <a:off x="4802429" y="1088898"/>
-            <a:ext cx="1812646" cy="1165479"/>
+            <a:off x="5110886" y="1109472"/>
+            <a:ext cx="1658417" cy="1157661"/>
           </a:xfrm>
           <a:prstGeom prst="rect">
             <a:avLst/>
@@ -1070,14 +1095,14 @@
       </p:sp>
       <p:sp>
         <p:nvSpPr>
-          <p:cNvPr id="7" name="Text 5"/>
+          <p:cNvPr id="8" name="Text 6"/>
           <p:cNvSpPr/>
           <p:nvPr/>
         </p:nvSpPr>
         <p:spPr>
           <a:xfrm>
-            <a:off x="4939589" y="1488758"/>
-            <a:ext cx="1538326" cy="365760"/>
+            <a:off x="5248046" y="1505422"/>
+            <a:ext cx="1384097" cy="365760"/>
           </a:xfrm>
           <a:prstGeom prst="rect">
             <a:avLst/>
@@ -1109,14 +1134,14 @@
       </p:sp>
       <p:sp>
         <p:nvSpPr>
-          <p:cNvPr id="8" name="Shape 6"/>
+          <p:cNvPr id="9" name="Shape 7"/>
           <p:cNvSpPr/>
           <p:nvPr/>
         </p:nvSpPr>
         <p:spPr>
           <a:xfrm>
-            <a:off x="6691274" y="1088898"/>
-            <a:ext cx="1812646" cy="1165479"/>
+            <a:off x="6845503" y="1109472"/>
+            <a:ext cx="1658417" cy="1157661"/>
           </a:xfrm>
           <a:prstGeom prst="rect">
             <a:avLst/>
@@ -1134,14 +1159,14 @@
       </p:sp>
       <p:sp>
         <p:nvSpPr>
-          <p:cNvPr id="9" name="Text 7"/>
+          <p:cNvPr id="10" name="Text 8"/>
           <p:cNvSpPr/>
           <p:nvPr/>
         </p:nvSpPr>
         <p:spPr>
           <a:xfrm>
-            <a:off x="6828434" y="1488758"/>
-            <a:ext cx="1538326" cy="365760"/>
+            <a:off x="6982663" y="1505422"/>
+            <a:ext cx="1384097" cy="365760"/>
           </a:xfrm>
           <a:prstGeom prst="rect">
             <a:avLst/>
@@ -1173,14 +1198,14 @@
       </p:sp>
       <p:sp>
         <p:nvSpPr>
-          <p:cNvPr id="10" name="Text 8"/>
+          <p:cNvPr id="11" name="Text 9"/>
           <p:cNvSpPr/>
           <p:nvPr/>
         </p:nvSpPr>
         <p:spPr>
           <a:xfrm>
-            <a:off x="4802429" y="2330577"/>
-            <a:ext cx="1831696" cy="395478"/>
+            <a:off x="5110886" y="2343333"/>
+            <a:ext cx="1677467" cy="395478"/>
           </a:xfrm>
           <a:prstGeom prst="rect">
             <a:avLst/>
@@ -1212,14 +1237,14 @@
       </p:sp>
       <p:sp>
         <p:nvSpPr>
-          <p:cNvPr id="11" name="Text 9"/>
+          <p:cNvPr id="12" name="Text 10"/>
           <p:cNvSpPr/>
           <p:nvPr/>
         </p:nvSpPr>
         <p:spPr>
           <a:xfrm>
-            <a:off x="6672224" y="2330577"/>
-            <a:ext cx="1831696" cy="395478"/>
+            <a:off x="6826453" y="2343333"/>
+            <a:ext cx="1677467" cy="395478"/>
           </a:xfrm>
           <a:prstGeom prst="rect">
             <a:avLst/>
@@ -1251,14 +1276,14 @@
       </p:sp>
       <p:sp>
         <p:nvSpPr>
-          <p:cNvPr id="12" name="Text 10"/>
+          <p:cNvPr id="13" name="Text 11"/>
           <p:cNvSpPr/>
           <p:nvPr/>
         </p:nvSpPr>
         <p:spPr>
           <a:xfrm>
-            <a:off x="4802429" y="2802255"/>
-            <a:ext cx="3701491" cy="635508"/>
+            <a:off x="5110886" y="2815011"/>
+            <a:ext cx="3393034" cy="635508"/>
           </a:xfrm>
           <a:prstGeom prst="rect">
             <a:avLst/>
@@ -1290,14 +1315,14 @@
       </p:sp>
       <p:sp>
         <p:nvSpPr>
-          <p:cNvPr id="13" name="Text 11"/>
+          <p:cNvPr id="14" name="Text 12"/>
           <p:cNvSpPr/>
           <p:nvPr/>
         </p:nvSpPr>
         <p:spPr>
           <a:xfrm>
-            <a:off x="4802429" y="3475863"/>
-            <a:ext cx="3701491" cy="320040"/>
+            <a:off x="5110886" y="3488619"/>
+            <a:ext cx="3393034" cy="320040"/>
           </a:xfrm>
           <a:prstGeom prst="rect">
             <a:avLst/>
@@ -1329,14 +1354,14 @@
       </p:sp>
       <p:sp>
         <p:nvSpPr>
-          <p:cNvPr id="14" name="Text 12"/>
+          <p:cNvPr id="15" name="Text 13"/>
           <p:cNvSpPr/>
           <p:nvPr/>
         </p:nvSpPr>
         <p:spPr>
           <a:xfrm>
-            <a:off x="4802429" y="3954780"/>
-            <a:ext cx="3701491" cy="201168"/>
+            <a:off x="5110886" y="3954780"/>
+            <a:ext cx="3393034" cy="201168"/>
           </a:xfrm>
           <a:prstGeom prst="rect">
             <a:avLst/>
@@ -1368,7 +1393,7 @@
       </p:sp>
       <p:sp>
         <p:nvSpPr>
-          <p:cNvPr id="15" name="Text 13"/>
+          <p:cNvPr id="16" name="Text 14"/>
           <p:cNvSpPr/>
           <p:nvPr/>
         </p:nvSpPr>

--- a/tests/golden/visual/composition/v7_hybrid_canvas/deck.pptx
+++ b/tests/golden/visual/composition/v7_hybrid_canvas/deck.pptx
@@ -910,7 +910,7 @@
         <p:spPr>
           <a:xfrm>
             <a:off x="640080" y="411480"/>
-            <a:ext cx="7863840" cy="621792"/>
+            <a:ext cx="7863840" cy="601218"/>
           </a:xfrm>
           <a:prstGeom prst="rect">
             <a:avLst/>
@@ -948,8 +948,8 @@
         </p:nvSpPr>
         <p:spPr>
           <a:xfrm>
-            <a:off x="5110886" y="1109472"/>
-            <a:ext cx="3393034" cy="3046476"/>
+            <a:off x="5110886" y="1088898"/>
+            <a:ext cx="3393034" cy="3204210"/>
           </a:xfrm>
           <a:prstGeom prst="rect">
             <a:avLst/>
@@ -973,8 +973,8 @@
         </p:nvSpPr>
         <p:spPr>
           <a:xfrm>
-            <a:off x="640080" y="1109472"/>
-            <a:ext cx="4318406" cy="2680899"/>
+            <a:off x="640080" y="1088898"/>
+            <a:ext cx="4318406" cy="2819705"/>
           </a:xfrm>
           <a:prstGeom prst="rect">
             <a:avLst/>
@@ -998,7 +998,7 @@
         </p:nvSpPr>
         <p:spPr>
           <a:xfrm>
-            <a:off x="777240" y="2267041"/>
+            <a:off x="777240" y="2315870"/>
             <a:ext cx="4044086" cy="365760"/>
           </a:xfrm>
           <a:prstGeom prst="rect">
@@ -1037,8 +1037,8 @@
         </p:nvSpPr>
         <p:spPr>
           <a:xfrm>
-            <a:off x="640080" y="3828471"/>
-            <a:ext cx="4318406" cy="327477"/>
+            <a:off x="640080" y="3946703"/>
+            <a:ext cx="4318406" cy="346405"/>
           </a:xfrm>
           <a:prstGeom prst="rect">
             <a:avLst/>
@@ -1076,8 +1076,8 @@
         </p:nvSpPr>
         <p:spPr>
           <a:xfrm>
-            <a:off x="5110886" y="1109472"/>
-            <a:ext cx="1658417" cy="1157661"/>
+            <a:off x="5110886" y="1088898"/>
+            <a:ext cx="1658417" cy="1217600"/>
           </a:xfrm>
           <a:prstGeom prst="rect">
             <a:avLst/>
@@ -1101,7 +1101,7 @@
         </p:nvSpPr>
         <p:spPr>
           <a:xfrm>
-            <a:off x="5248046" y="1505422"/>
+            <a:off x="5248046" y="1514818"/>
             <a:ext cx="1384097" cy="365760"/>
           </a:xfrm>
           <a:prstGeom prst="rect">
@@ -1140,8 +1140,8 @@
         </p:nvSpPr>
         <p:spPr>
           <a:xfrm>
-            <a:off x="6845503" y="1109472"/>
-            <a:ext cx="1658417" cy="1157661"/>
+            <a:off x="6845503" y="1088898"/>
+            <a:ext cx="1658417" cy="1217600"/>
           </a:xfrm>
           <a:prstGeom prst="rect">
             <a:avLst/>
@@ -1165,7 +1165,7 @@
         </p:nvSpPr>
         <p:spPr>
           <a:xfrm>
-            <a:off x="6982663" y="1505422"/>
+            <a:off x="6982663" y="1514818"/>
             <a:ext cx="1384097" cy="365760"/>
           </a:xfrm>
           <a:prstGeom prst="rect">
@@ -1204,7 +1204,7 @@
         </p:nvSpPr>
         <p:spPr>
           <a:xfrm>
-            <a:off x="5110886" y="2343333"/>
+            <a:off x="5110886" y="2382698"/>
             <a:ext cx="1677467" cy="395478"/>
           </a:xfrm>
           <a:prstGeom prst="rect">
@@ -1243,7 +1243,7 @@
         </p:nvSpPr>
         <p:spPr>
           <a:xfrm>
-            <a:off x="6826453" y="2343333"/>
+            <a:off x="6826453" y="2382698"/>
             <a:ext cx="1677467" cy="395478"/>
           </a:xfrm>
           <a:prstGeom prst="rect">
@@ -1282,7 +1282,7 @@
         </p:nvSpPr>
         <p:spPr>
           <a:xfrm>
-            <a:off x="5110886" y="2815011"/>
+            <a:off x="5110886" y="2854376"/>
             <a:ext cx="3393034" cy="635508"/>
           </a:xfrm>
           <a:prstGeom prst="rect">
@@ -1321,7 +1321,7 @@
         </p:nvSpPr>
         <p:spPr>
           <a:xfrm>
-            <a:off x="5110886" y="3488619"/>
+            <a:off x="5110886" y="3527984"/>
             <a:ext cx="3393034" cy="320040"/>
           </a:xfrm>
           <a:prstGeom prst="rect">
@@ -1360,7 +1360,7 @@
         </p:nvSpPr>
         <p:spPr>
           <a:xfrm>
-            <a:off x="5110886" y="3954780"/>
+            <a:off x="5110886" y="4091940"/>
             <a:ext cx="3393034" cy="201168"/>
           </a:xfrm>
           <a:prstGeom prst="rect">

--- a/tests/golden/visual/composition/v7_hybrid_canvas/deck.pptx
+++ b/tests/golden/visual/composition/v7_hybrid_canvas/deck.pptx
@@ -580,7 +580,7 @@
     <p:bg>
       <p:bgPr>
         <a:solidFill>
-          <a:srgbClr val="F7F6F3"/>
+          <a:srgbClr val="D9E2EA"/>
         </a:solidFill>
       </p:bgPr>
     </p:bg>
@@ -909,8 +909,8 @@
         </p:nvSpPr>
         <p:spPr>
           <a:xfrm>
-            <a:off x="640080" y="411480"/>
-            <a:ext cx="7863840" cy="601218"/>
+            <a:off x="502920" y="347472"/>
+            <a:ext cx="8138160" cy="594360"/>
           </a:xfrm>
           <a:prstGeom prst="rect">
             <a:avLst/>
@@ -926,9 +926,9 @@
               <a:buNone/>
             </a:pPr>
             <a:r>
-              <a:rPr lang="en-US" sz="3400" b="1" dirty="0">
+              <a:rPr lang="en-US" sz="2000" b="1" dirty="0">
                 <a:solidFill>
-                  <a:srgbClr val="1A1A1A"/>
+                  <a:srgbClr val="1B3A4B"/>
                 </a:solidFill>
                 <a:latin typeface="Microsoft YaHei" pitchFamily="34" charset="0"/>
                 <a:ea typeface="Microsoft YaHei" pitchFamily="34" charset="-122"/>
@@ -936,7 +936,7 @@
               </a:rPr>
               <a:t>核心区改造：图纸与证据对照</a:t>
             </a:r>
-            <a:endParaRPr lang="en-US" sz="3400" dirty="0"/>
+            <a:endParaRPr lang="en-US" sz="2000" dirty="0"/>
           </a:p>
         </p:txBody>
       </p:sp>
@@ -948,8 +948,8 @@
         </p:nvSpPr>
         <p:spPr>
           <a:xfrm>
-            <a:off x="5110886" y="1088898"/>
-            <a:ext cx="3393034" cy="3204210"/>
+            <a:off x="5127346" y="1018032"/>
+            <a:ext cx="3513734" cy="3339084"/>
           </a:xfrm>
           <a:prstGeom prst="rect">
             <a:avLst/>
@@ -959,7 +959,7 @@
           </a:solidFill>
           <a:ln w="12700">
             <a:solidFill>
-              <a:srgbClr val="D9D5CF"/>
+              <a:srgbClr val="B7C5D1"/>
             </a:solidFill>
             <a:prstDash val="solid"/>
           </a:ln>
@@ -973,14 +973,14 @@
         </p:nvSpPr>
         <p:spPr>
           <a:xfrm>
-            <a:off x="640080" y="1088898"/>
-            <a:ext cx="4318406" cy="2819705"/>
-          </a:xfrm>
-          <a:prstGeom prst="rect">
-            <a:avLst/>
-          </a:prstGeom>
-          <a:solidFill>
-            <a:srgbClr val="FFFFFF"/>
+            <a:off x="502920" y="1018032"/>
+            <a:ext cx="4472026" cy="2938394"/>
+          </a:xfrm>
+          <a:prstGeom prst="rect">
+            <a:avLst/>
+          </a:prstGeom>
+          <a:solidFill>
+            <a:srgbClr val="F3F7FA"/>
           </a:solidFill>
           <a:ln w="19050">
             <a:solidFill>
@@ -998,8 +998,8 @@
         </p:nvSpPr>
         <p:spPr>
           <a:xfrm>
-            <a:off x="777240" y="2315870"/>
-            <a:ext cx="4044086" cy="365760"/>
+            <a:off x="640080" y="2304349"/>
+            <a:ext cx="4197706" cy="365760"/>
           </a:xfrm>
           <a:prstGeom prst="rect">
             <a:avLst/>
@@ -1017,7 +1017,7 @@
             <a:r>
               <a:rPr lang="en-US" sz="1200" dirty="0">
                 <a:solidFill>
-                  <a:srgbClr val="777777"/>
+                  <a:srgbClr val="6A7D8C"/>
                 </a:solidFill>
                 <a:latin typeface="Microsoft YaHei" pitchFamily="34" charset="0"/>
                 <a:ea typeface="Microsoft YaHei" pitchFamily="34" charset="-122"/>
@@ -1037,8 +1037,8 @@
         </p:nvSpPr>
         <p:spPr>
           <a:xfrm>
-            <a:off x="640080" y="3946703"/>
-            <a:ext cx="4318406" cy="346405"/>
+            <a:off x="502920" y="3994526"/>
+            <a:ext cx="4472026" cy="362590"/>
           </a:xfrm>
           <a:prstGeom prst="rect">
             <a:avLst/>
@@ -1054,9 +1054,9 @@
               <a:buNone/>
             </a:pPr>
             <a:r>
-              <a:rPr lang="en-US" sz="1200" dirty="0">
+              <a:rPr lang="en-US" sz="1100" dirty="0">
                 <a:solidFill>
-                  <a:srgbClr val="777777"/>
+                  <a:srgbClr val="3A4F5F"/>
                 </a:solidFill>
                 <a:latin typeface="Microsoft YaHei" pitchFamily="34" charset="0"/>
                 <a:ea typeface="Microsoft YaHei" pitchFamily="34" charset="-122"/>
@@ -1064,7 +1064,7 @@
               </a:rPr>
               <a:t>图1 核心区总平面</a:t>
             </a:r>
-            <a:endParaRPr lang="en-US" sz="1200" dirty="0"/>
+            <a:endParaRPr lang="en-US" sz="1100" dirty="0"/>
           </a:p>
         </p:txBody>
       </p:sp>
@@ -1076,14 +1076,14 @@
         </p:nvSpPr>
         <p:spPr>
           <a:xfrm>
-            <a:off x="5110886" y="1088898"/>
-            <a:ext cx="1658417" cy="1217600"/>
-          </a:xfrm>
-          <a:prstGeom prst="rect">
-            <a:avLst/>
-          </a:prstGeom>
-          <a:solidFill>
-            <a:srgbClr val="FFFFFF"/>
+            <a:off x="5127346" y="1018032"/>
+            <a:ext cx="1718767" cy="1234440"/>
+          </a:xfrm>
+          <a:prstGeom prst="rect">
+            <a:avLst/>
+          </a:prstGeom>
+          <a:solidFill>
+            <a:srgbClr val="F3F7FA"/>
           </a:solidFill>
           <a:ln w="19050">
             <a:solidFill>
@@ -1101,8 +1101,8 @@
         </p:nvSpPr>
         <p:spPr>
           <a:xfrm>
-            <a:off x="5248046" y="1514818"/>
-            <a:ext cx="1384097" cy="365760"/>
+            <a:off x="5264506" y="1452372"/>
+            <a:ext cx="1444447" cy="365760"/>
           </a:xfrm>
           <a:prstGeom prst="rect">
             <a:avLst/>
@@ -1120,7 +1120,7 @@
             <a:r>
               <a:rPr lang="en-US" sz="1200" dirty="0">
                 <a:solidFill>
-                  <a:srgbClr val="777777"/>
+                  <a:srgbClr val="6A7D8C"/>
                 </a:solidFill>
                 <a:latin typeface="Microsoft YaHei" pitchFamily="34" charset="0"/>
                 <a:ea typeface="Microsoft YaHei" pitchFamily="34" charset="-122"/>
@@ -1140,14 +1140,14 @@
         </p:nvSpPr>
         <p:spPr>
           <a:xfrm>
-            <a:off x="6845503" y="1088898"/>
-            <a:ext cx="1658417" cy="1217600"/>
-          </a:xfrm>
-          <a:prstGeom prst="rect">
-            <a:avLst/>
-          </a:prstGeom>
-          <a:solidFill>
-            <a:srgbClr val="FFFFFF"/>
+            <a:off x="6922313" y="1018032"/>
+            <a:ext cx="1718767" cy="1234440"/>
+          </a:xfrm>
+          <a:prstGeom prst="rect">
+            <a:avLst/>
+          </a:prstGeom>
+          <a:solidFill>
+            <a:srgbClr val="F3F7FA"/>
           </a:solidFill>
           <a:ln w="19050">
             <a:solidFill>
@@ -1165,8 +1165,8 @@
         </p:nvSpPr>
         <p:spPr>
           <a:xfrm>
-            <a:off x="6982663" y="1514818"/>
-            <a:ext cx="1384097" cy="365760"/>
+            <a:off x="7059473" y="1452372"/>
+            <a:ext cx="1444447" cy="365760"/>
           </a:xfrm>
           <a:prstGeom prst="rect">
             <a:avLst/>
@@ -1184,7 +1184,7 @@
             <a:r>
               <a:rPr lang="en-US" sz="1200" dirty="0">
                 <a:solidFill>
-                  <a:srgbClr val="777777"/>
+                  <a:srgbClr val="6A7D8C"/>
                 </a:solidFill>
                 <a:latin typeface="Microsoft YaHei" pitchFamily="34" charset="0"/>
                 <a:ea typeface="Microsoft YaHei" pitchFamily="34" charset="-122"/>
@@ -1204,8 +1204,8 @@
         </p:nvSpPr>
         <p:spPr>
           <a:xfrm>
-            <a:off x="5110886" y="2382698"/>
-            <a:ext cx="1677467" cy="395478"/>
+            <a:off x="5127346" y="2328672"/>
+            <a:ext cx="1737817" cy="361188"/>
           </a:xfrm>
           <a:prstGeom prst="rect">
             <a:avLst/>
@@ -1221,9 +1221,9 @@
               <a:buNone/>
             </a:pPr>
             <a:r>
-              <a:rPr lang="en-US" sz="2200" b="1" dirty="0">
+              <a:rPr lang="en-US" sz="2000" b="1" dirty="0">
                 <a:solidFill>
-                  <a:srgbClr val="2C3E50"/>
+                  <a:srgbClr val="C45C26"/>
                 </a:solidFill>
                 <a:latin typeface="Microsoft YaHei" pitchFamily="34" charset="0"/>
                 <a:ea typeface="Microsoft YaHei" pitchFamily="34" charset="-122"/>
@@ -1231,7 +1231,7 @@
               </a:rPr>
               <a:t>建筑密度 1.6</a:t>
             </a:r>
-            <a:endParaRPr lang="en-US" sz="2200" dirty="0"/>
+            <a:endParaRPr lang="en-US" sz="2000" dirty="0"/>
           </a:p>
         </p:txBody>
       </p:sp>
@@ -1243,8 +1243,8 @@
         </p:nvSpPr>
         <p:spPr>
           <a:xfrm>
-            <a:off x="6826453" y="2382698"/>
-            <a:ext cx="1677467" cy="395478"/>
+            <a:off x="6903263" y="2328672"/>
+            <a:ext cx="1737817" cy="361188"/>
           </a:xfrm>
           <a:prstGeom prst="rect">
             <a:avLst/>
@@ -1260,9 +1260,9 @@
               <a:buNone/>
             </a:pPr>
             <a:r>
-              <a:rPr lang="en-US" sz="2200" b="1" dirty="0">
+              <a:rPr lang="en-US" sz="2000" b="1" dirty="0">
                 <a:solidFill>
-                  <a:srgbClr val="2C3E50"/>
+                  <a:srgbClr val="C45C26"/>
                 </a:solidFill>
                 <a:latin typeface="Microsoft YaHei" pitchFamily="34" charset="0"/>
                 <a:ea typeface="Microsoft YaHei" pitchFamily="34" charset="-122"/>
@@ -1270,7 +1270,7 @@
               </a:rPr>
               <a:t>绿地率 35%</a:t>
             </a:r>
-            <a:endParaRPr lang="en-US" sz="2200" dirty="0"/>
+            <a:endParaRPr lang="en-US" sz="2000" dirty="0"/>
           </a:p>
         </p:txBody>
       </p:sp>
@@ -1282,8 +1282,8 @@
         </p:nvSpPr>
         <p:spPr>
           <a:xfrm>
-            <a:off x="5110886" y="2854376"/>
-            <a:ext cx="3393034" cy="635508"/>
+            <a:off x="5127346" y="2766060"/>
+            <a:ext cx="3513734" cy="498348"/>
           </a:xfrm>
           <a:prstGeom prst="rect">
             <a:avLst/>
@@ -1299,9 +1299,9 @@
               <a:buNone/>
             </a:pPr>
             <a:r>
-              <a:rPr lang="en-US" sz="1800" dirty="0">
+              <a:rPr lang="en-US" sz="1400" b="1" dirty="0">
                 <a:solidFill>
-                  <a:srgbClr val="4A4A4A"/>
+                  <a:srgbClr val="1B3A4B"/>
                 </a:solidFill>
                 <a:latin typeface="Microsoft YaHei" pitchFamily="34" charset="0"/>
                 <a:ea typeface="Microsoft YaHei" pitchFamily="34" charset="-122"/>
@@ -1309,7 +1309,7 @@
               </a:rPr>
               <a:t>主图纸给出结构骨架，辅助图与指标共同说明改造优先级。</a:t>
             </a:r>
-            <a:endParaRPr lang="en-US" sz="1800" dirty="0"/>
+            <a:endParaRPr lang="en-US" sz="1400" dirty="0"/>
           </a:p>
         </p:txBody>
       </p:sp>
@@ -1321,8 +1321,8 @@
         </p:nvSpPr>
         <p:spPr>
           <a:xfrm>
-            <a:off x="5110886" y="3527984"/>
-            <a:ext cx="3393034" cy="320040"/>
+            <a:off x="5127346" y="3302508"/>
+            <a:ext cx="3513734" cy="498348"/>
           </a:xfrm>
           <a:prstGeom prst="rect">
             <a:avLst/>
@@ -1338,9 +1338,9 @@
               <a:buNone/>
             </a:pPr>
             <a:r>
-              <a:rPr lang="en-US" sz="1600" dirty="0">
+              <a:rPr lang="en-US" sz="1400" dirty="0">
                 <a:solidFill>
-                  <a:srgbClr val="1A1A1A"/>
+                  <a:srgbClr val="132533"/>
                 </a:solidFill>
                 <a:latin typeface="Microsoft YaHei" pitchFamily="34" charset="0"/>
                 <a:ea typeface="Microsoft YaHei" pitchFamily="34" charset="-122"/>
@@ -1348,38 +1348,55 @@
               </a:rPr>
               <a:t>· 优先打通北侧急救轴</a:t>
             </a:r>
-            <a:endParaRPr lang="en-US" sz="1600" dirty="0"/>
-          </a:p>
-        </p:txBody>
-      </p:sp>
-      <p:sp>
-        <p:nvSpPr>
-          <p:cNvPr id="15" name="Text 13"/>
-          <p:cNvSpPr/>
-          <p:nvPr/>
-        </p:nvSpPr>
-        <p:spPr>
-          <a:xfrm>
-            <a:off x="5110886" y="4091940"/>
-            <a:ext cx="3393034" cy="201168"/>
-          </a:xfrm>
-          <a:prstGeom prst="rect">
-            <a:avLst/>
-          </a:prstGeom>
-          <a:noFill/>
-          <a:ln/>
-        </p:spPr>
-        <p:txBody>
-          <a:bodyPr wrap="square" rtlCol="0" anchor="t"/>
-          <a:lstStyle/>
+            <a:endParaRPr lang="en-US" sz="1400" dirty="0"/>
+          </a:p>
           <a:p>
             <a:pPr algn="l" indent="0" marL="0">
               <a:buNone/>
             </a:pPr>
             <a:r>
-              <a:rPr lang="en-US" sz="1200" dirty="0">
+              <a:rPr lang="en-US" sz="1400" dirty="0">
                 <a:solidFill>
-                  <a:srgbClr val="777777"/>
+                  <a:srgbClr val="132533"/>
+                </a:solidFill>
+                <a:latin typeface="Microsoft YaHei" pitchFamily="34" charset="0"/>
+                <a:ea typeface="Microsoft YaHei" pitchFamily="34" charset="-122"/>
+                <a:cs typeface="Microsoft YaHei" pitchFamily="34" charset="-120"/>
+              </a:rPr>
+              <a:t>· 保留南侧景观缓冲</a:t>
+            </a:r>
+            <a:endParaRPr lang="en-US" sz="1400" dirty="0"/>
+          </a:p>
+        </p:txBody>
+      </p:sp>
+      <p:sp>
+        <p:nvSpPr>
+          <p:cNvPr id="15" name="Text 13"/>
+          <p:cNvSpPr/>
+          <p:nvPr/>
+        </p:nvSpPr>
+        <p:spPr>
+          <a:xfrm>
+            <a:off x="5127346" y="4155948"/>
+            <a:ext cx="3513734" cy="201168"/>
+          </a:xfrm>
+          <a:prstGeom prst="rect">
+            <a:avLst/>
+          </a:prstGeom>
+          <a:noFill/>
+          <a:ln/>
+        </p:spPr>
+        <p:txBody>
+          <a:bodyPr wrap="square" rtlCol="0" anchor="t"/>
+          <a:lstStyle/>
+          <a:p>
+            <a:pPr algn="l" indent="0" marL="0">
+              <a:buNone/>
+            </a:pPr>
+            <a:r>
+              <a:rPr lang="en-US" sz="1100" dirty="0">
+                <a:solidFill>
+                  <a:srgbClr val="3A4F5F"/>
                 </a:solidFill>
                 <a:latin typeface="Microsoft YaHei" pitchFamily="34" charset="0"/>
                 <a:ea typeface="Microsoft YaHei" pitchFamily="34" charset="-122"/>
@@ -1387,7 +1404,7 @@
               </a:rPr>
               <a:t>图2 南北侧现状对照</a:t>
             </a:r>
-            <a:endParaRPr lang="en-US" sz="1200" dirty="0"/>
+            <a:endParaRPr lang="en-US" sz="1100" dirty="0"/>
           </a:p>
         </p:txBody>
       </p:sp>
@@ -1399,8 +1416,8 @@
         </p:nvSpPr>
         <p:spPr>
           <a:xfrm>
-            <a:off x="640080" y="4530852"/>
-            <a:ext cx="5504688" cy="201168"/>
+            <a:off x="502920" y="4594860"/>
+            <a:ext cx="5696712" cy="201168"/>
           </a:xfrm>
           <a:prstGeom prst="rect">
             <a:avLst/>
@@ -1418,7 +1435,7 @@
             <a:r>
               <a:rPr lang="en-US" sz="800" dirty="0">
                 <a:solidFill>
-                  <a:srgbClr val="777777"/>
+                  <a:srgbClr val="6A7D8C"/>
                 </a:solidFill>
                 <a:latin typeface="Microsoft YaHei" pitchFamily="34" charset="0"/>
                 <a:ea typeface="Microsoft YaHei" pitchFamily="34" charset="-122"/>
